--- a/lecture-slides_upload/lab-activity/7-lab activity-mod-med.pptx
+++ b/lecture-slides_upload/lab-activity/7-lab activity-mod-med.pptx
@@ -5,7 +5,7 @@
     <p:sldMasterId id="2147483648" r:id="rId1"/>
   </p:sldMasterIdLst>
   <p:notesMasterIdLst>
-    <p:notesMasterId r:id="rId17"/>
+    <p:notesMasterId r:id="rId20"/>
   </p:notesMasterIdLst>
   <p:sldIdLst>
     <p:sldId id="256" r:id="rId2"/>
@@ -23,6 +23,9 @@
     <p:sldId id="267" r:id="rId14"/>
     <p:sldId id="269" r:id="rId15"/>
     <p:sldId id="270" r:id="rId16"/>
+    <p:sldId id="271" r:id="rId17"/>
+    <p:sldId id="272" r:id="rId18"/>
+    <p:sldId id="273" r:id="rId19"/>
   </p:sldIdLst>
   <p:sldSz cx="12192000" cy="6858000"/>
   <p:notesSz cx="6858000" cy="9144000"/>
@@ -211,7 +214,7 @@
           <a:p>
             <a:fld id="{B59E6B04-C920-1342-87FE-EBE906AB3880}" type="datetimeFigureOut">
               <a:rPr lang="en-US" smtClean="0"/>
-              <a:t>2/29/24</a:t>
+              <a:t>10/14/25</a:t>
             </a:fld>
             <a:endParaRPr lang="en-US"/>
           </a:p>
@@ -1076,7 +1079,7 @@
           <a:p>
             <a:fld id="{5CECF48E-7F29-374A-B42E-13AE848863CD}" type="datetimeFigureOut">
               <a:rPr lang="en-US" smtClean="0"/>
-              <a:t>2/29/24</a:t>
+              <a:t>10/14/25</a:t>
             </a:fld>
             <a:endParaRPr lang="en-US"/>
           </a:p>
@@ -1274,7 +1277,7 @@
           <a:p>
             <a:fld id="{5CECF48E-7F29-374A-B42E-13AE848863CD}" type="datetimeFigureOut">
               <a:rPr lang="en-US" smtClean="0"/>
-              <a:t>2/29/24</a:t>
+              <a:t>10/14/25</a:t>
             </a:fld>
             <a:endParaRPr lang="en-US"/>
           </a:p>
@@ -1482,7 +1485,7 @@
           <a:p>
             <a:fld id="{5CECF48E-7F29-374A-B42E-13AE848863CD}" type="datetimeFigureOut">
               <a:rPr lang="en-US" smtClean="0"/>
-              <a:t>2/29/24</a:t>
+              <a:t>10/14/25</a:t>
             </a:fld>
             <a:endParaRPr lang="en-US"/>
           </a:p>
@@ -1680,7 +1683,7 @@
           <a:p>
             <a:fld id="{5CECF48E-7F29-374A-B42E-13AE848863CD}" type="datetimeFigureOut">
               <a:rPr lang="en-US" smtClean="0"/>
-              <a:t>2/29/24</a:t>
+              <a:t>10/14/25</a:t>
             </a:fld>
             <a:endParaRPr lang="en-US"/>
           </a:p>
@@ -1955,7 +1958,7 @@
           <a:p>
             <a:fld id="{5CECF48E-7F29-374A-B42E-13AE848863CD}" type="datetimeFigureOut">
               <a:rPr lang="en-US" smtClean="0"/>
-              <a:t>2/29/24</a:t>
+              <a:t>10/14/25</a:t>
             </a:fld>
             <a:endParaRPr lang="en-US"/>
           </a:p>
@@ -2220,7 +2223,7 @@
           <a:p>
             <a:fld id="{5CECF48E-7F29-374A-B42E-13AE848863CD}" type="datetimeFigureOut">
               <a:rPr lang="en-US" smtClean="0"/>
-              <a:t>2/29/24</a:t>
+              <a:t>10/14/25</a:t>
             </a:fld>
             <a:endParaRPr lang="en-US"/>
           </a:p>
@@ -2632,7 +2635,7 @@
           <a:p>
             <a:fld id="{5CECF48E-7F29-374A-B42E-13AE848863CD}" type="datetimeFigureOut">
               <a:rPr lang="en-US" smtClean="0"/>
-              <a:t>2/29/24</a:t>
+              <a:t>10/14/25</a:t>
             </a:fld>
             <a:endParaRPr lang="en-US"/>
           </a:p>
@@ -2773,7 +2776,7 @@
           <a:p>
             <a:fld id="{5CECF48E-7F29-374A-B42E-13AE848863CD}" type="datetimeFigureOut">
               <a:rPr lang="en-US" smtClean="0"/>
-              <a:t>2/29/24</a:t>
+              <a:t>10/14/25</a:t>
             </a:fld>
             <a:endParaRPr lang="en-US"/>
           </a:p>
@@ -2886,7 +2889,7 @@
           <a:p>
             <a:fld id="{5CECF48E-7F29-374A-B42E-13AE848863CD}" type="datetimeFigureOut">
               <a:rPr lang="en-US" smtClean="0"/>
-              <a:t>2/29/24</a:t>
+              <a:t>10/14/25</a:t>
             </a:fld>
             <a:endParaRPr lang="en-US"/>
           </a:p>
@@ -3197,7 +3200,7 @@
           <a:p>
             <a:fld id="{5CECF48E-7F29-374A-B42E-13AE848863CD}" type="datetimeFigureOut">
               <a:rPr lang="en-US" smtClean="0"/>
-              <a:t>2/29/24</a:t>
+              <a:t>10/14/25</a:t>
             </a:fld>
             <a:endParaRPr lang="en-US"/>
           </a:p>
@@ -3485,7 +3488,7 @@
           <a:p>
             <a:fld id="{5CECF48E-7F29-374A-B42E-13AE848863CD}" type="datetimeFigureOut">
               <a:rPr lang="en-US" smtClean="0"/>
-              <a:t>2/29/24</a:t>
+              <a:t>10/14/25</a:t>
             </a:fld>
             <a:endParaRPr lang="en-US"/>
           </a:p>
@@ -3726,7 +3729,7 @@
           <a:p>
             <a:fld id="{5CECF48E-7F29-374A-B42E-13AE848863CD}" type="datetimeFigureOut">
               <a:rPr lang="en-US" smtClean="0"/>
-              <a:t>2/29/24</a:t>
+              <a:t>10/14/25</a:t>
             </a:fld>
             <a:endParaRPr lang="en-US"/>
           </a:p>
@@ -5710,6 +5713,344 @@
     <p:extLst>
       <p:ext uri="{BB962C8B-B14F-4D97-AF65-F5344CB8AC3E}">
         <p14:creationId xmlns:p14="http://schemas.microsoft.com/office/powerpoint/2010/main" val="1316173624"/>
+      </p:ext>
+    </p:extLst>
+  </p:cSld>
+  <p:clrMapOvr>
+    <a:masterClrMapping/>
+  </p:clrMapOvr>
+</p:sld>
+</file>
+
+<file path=ppt/slides/slide16.xml><?xml version="1.0" encoding="utf-8"?>
+<p:sld xmlns:a="http://schemas.openxmlformats.org/drawingml/2006/main" xmlns:r="http://schemas.openxmlformats.org/officeDocument/2006/relationships" xmlns:p="http://schemas.openxmlformats.org/presentationml/2006/main">
+  <p:cSld>
+    <p:spTree>
+      <p:nvGrpSpPr>
+        <p:cNvPr id="1" name=""/>
+        <p:cNvGrpSpPr/>
+        <p:nvPr/>
+      </p:nvGrpSpPr>
+      <p:grpSpPr>
+        <a:xfrm>
+          <a:off x="0" y="0"/>
+          <a:ext cx="0" cy="0"/>
+          <a:chOff x="0" y="0"/>
+          <a:chExt cx="0" cy="0"/>
+        </a:xfrm>
+      </p:grpSpPr>
+      <p:sp>
+        <p:nvSpPr>
+          <p:cNvPr id="2" name="Title 1">
+            <a:extLst>
+              <a:ext uri="{FF2B5EF4-FFF2-40B4-BE49-F238E27FC236}">
+                <a16:creationId xmlns:a16="http://schemas.microsoft.com/office/drawing/2014/main" id="{8A29FD15-687C-DD8B-2DC3-596F7551FE59}"/>
+              </a:ext>
+            </a:extLst>
+          </p:cNvPr>
+          <p:cNvSpPr>
+            <a:spLocks noGrp="1"/>
+          </p:cNvSpPr>
+          <p:nvPr>
+            <p:ph type="title"/>
+          </p:nvPr>
+        </p:nvSpPr>
+        <p:spPr/>
+        <p:txBody>
+          <a:bodyPr/>
+          <a:lstStyle/>
+          <a:p>
+            <a:r>
+              <a:rPr lang="en-US" dirty="0"/>
+              <a:t>Causal Evidence (for X -&gt; Y)</a:t>
+            </a:r>
+          </a:p>
+        </p:txBody>
+      </p:sp>
+      <p:sp>
+        <p:nvSpPr>
+          <p:cNvPr id="3" name="Content Placeholder 2">
+            <a:extLst>
+              <a:ext uri="{FF2B5EF4-FFF2-40B4-BE49-F238E27FC236}">
+                <a16:creationId xmlns:a16="http://schemas.microsoft.com/office/drawing/2014/main" id="{32347BAA-01BD-B688-F042-DFE22DDC1143}"/>
+              </a:ext>
+            </a:extLst>
+          </p:cNvPr>
+          <p:cNvSpPr>
+            <a:spLocks noGrp="1"/>
+          </p:cNvSpPr>
+          <p:nvPr>
+            <p:ph idx="1"/>
+          </p:nvPr>
+        </p:nvSpPr>
+        <p:spPr>
+          <a:xfrm>
+            <a:off x="236483" y="1825625"/>
+            <a:ext cx="11698014" cy="4351338"/>
+          </a:xfrm>
+        </p:spPr>
+        <p:txBody>
+          <a:bodyPr/>
+          <a:lstStyle/>
+          <a:p>
+            <a:r>
+              <a:rPr lang="en-US" dirty="0"/>
+              <a:t>Change in X is associated with change in Y (association)</a:t>
+            </a:r>
+          </a:p>
+          <a:p>
+            <a:r>
+              <a:rPr lang="en-US" dirty="0"/>
+              <a:t>Change in X precedes change in Y (temporal precedence/directionality)</a:t>
+            </a:r>
+          </a:p>
+          <a:p>
+            <a:r>
+              <a:rPr lang="en-US" dirty="0"/>
+              <a:t>No other variable accounts for the association (internal validity/no 3</a:t>
+            </a:r>
+            <a:r>
+              <a:rPr lang="en-US" baseline="30000" dirty="0"/>
+              <a:t>rd</a:t>
+            </a:r>
+            <a:r>
+              <a:rPr lang="en-US" dirty="0"/>
+              <a:t> variable)</a:t>
+            </a:r>
+          </a:p>
+        </p:txBody>
+      </p:sp>
+    </p:spTree>
+    <p:extLst>
+      <p:ext uri="{BB962C8B-B14F-4D97-AF65-F5344CB8AC3E}">
+        <p14:creationId xmlns:p14="http://schemas.microsoft.com/office/powerpoint/2010/main" val="3829755489"/>
+      </p:ext>
+    </p:extLst>
+  </p:cSld>
+  <p:clrMapOvr>
+    <a:masterClrMapping/>
+  </p:clrMapOvr>
+</p:sld>
+</file>
+
+<file path=ppt/slides/slide17.xml><?xml version="1.0" encoding="utf-8"?>
+<p:sld xmlns:a="http://schemas.openxmlformats.org/drawingml/2006/main" xmlns:r="http://schemas.openxmlformats.org/officeDocument/2006/relationships" xmlns:p="http://schemas.openxmlformats.org/presentationml/2006/main">
+  <p:cSld>
+    <p:spTree>
+      <p:nvGrpSpPr>
+        <p:cNvPr id="1" name=""/>
+        <p:cNvGrpSpPr/>
+        <p:nvPr/>
+      </p:nvGrpSpPr>
+      <p:grpSpPr>
+        <a:xfrm>
+          <a:off x="0" y="0"/>
+          <a:ext cx="0" cy="0"/>
+          <a:chOff x="0" y="0"/>
+          <a:chExt cx="0" cy="0"/>
+        </a:xfrm>
+      </p:grpSpPr>
+      <p:sp>
+        <p:nvSpPr>
+          <p:cNvPr id="2" name="Title 1">
+            <a:extLst>
+              <a:ext uri="{FF2B5EF4-FFF2-40B4-BE49-F238E27FC236}">
+                <a16:creationId xmlns:a16="http://schemas.microsoft.com/office/drawing/2014/main" id="{79ADEC4E-7BF5-FD96-C524-C9995E50A656}"/>
+              </a:ext>
+            </a:extLst>
+          </p:cNvPr>
+          <p:cNvSpPr>
+            <a:spLocks noGrp="1"/>
+          </p:cNvSpPr>
+          <p:nvPr>
+            <p:ph type="title"/>
+          </p:nvPr>
+        </p:nvSpPr>
+        <p:spPr/>
+        <p:txBody>
+          <a:bodyPr/>
+          <a:lstStyle/>
+          <a:p>
+            <a:r>
+              <a:rPr lang="en-US" dirty="0"/>
+              <a:t>Mediation model assumptions (X -&gt; M -&gt; Y)</a:t>
+            </a:r>
+          </a:p>
+        </p:txBody>
+      </p:sp>
+      <p:sp>
+        <p:nvSpPr>
+          <p:cNvPr id="3" name="Content Placeholder 2">
+            <a:extLst>
+              <a:ext uri="{FF2B5EF4-FFF2-40B4-BE49-F238E27FC236}">
+                <a16:creationId xmlns:a16="http://schemas.microsoft.com/office/drawing/2014/main" id="{DCDEAC66-3993-A655-EE19-B105BF7147E5}"/>
+              </a:ext>
+            </a:extLst>
+          </p:cNvPr>
+          <p:cNvSpPr>
+            <a:spLocks noGrp="1"/>
+          </p:cNvSpPr>
+          <p:nvPr>
+            <p:ph idx="1"/>
+          </p:nvPr>
+        </p:nvSpPr>
+        <p:spPr/>
+        <p:txBody>
+          <a:bodyPr/>
+          <a:lstStyle/>
+          <a:p>
+            <a:r>
+              <a:rPr lang="en-US" dirty="0"/>
+              <a:t>temporal precedence/directionality </a:t>
+            </a:r>
+          </a:p>
+          <a:p>
+            <a:pPr lvl="1"/>
+            <a:r>
+              <a:rPr lang="en-US" dirty="0"/>
+              <a:t>X precedes M</a:t>
+            </a:r>
+          </a:p>
+          <a:p>
+            <a:pPr lvl="1"/>
+            <a:r>
+              <a:rPr lang="en-US" dirty="0"/>
+              <a:t>M precedes Y</a:t>
+            </a:r>
+          </a:p>
+          <a:p>
+            <a:r>
+              <a:rPr lang="en-US" dirty="0"/>
+              <a:t>Internal validity</a:t>
+            </a:r>
+          </a:p>
+          <a:p>
+            <a:pPr lvl="1"/>
+            <a:r>
+              <a:rPr lang="en-US" dirty="0"/>
+              <a:t>All relevant variables are controlled</a:t>
+            </a:r>
+          </a:p>
+          <a:p>
+            <a:pPr lvl="1"/>
+            <a:endParaRPr lang="en-US" dirty="0"/>
+          </a:p>
+          <a:p>
+            <a:r>
+              <a:rPr lang="en-US" dirty="0"/>
+              <a:t>Strongest case when X and M are experimentally manipulated (in multiple studies)</a:t>
+            </a:r>
+          </a:p>
+          <a:p>
+            <a:pPr lvl="1"/>
+            <a:r>
+              <a:rPr lang="en-US" dirty="0"/>
+              <a:t>Manipulate X, measure M and Y</a:t>
+            </a:r>
+          </a:p>
+          <a:p>
+            <a:pPr lvl="1"/>
+            <a:r>
+              <a:rPr lang="en-US" dirty="0"/>
+              <a:t>Manipulate M, measure X and Y</a:t>
+            </a:r>
+          </a:p>
+          <a:p>
+            <a:endParaRPr lang="en-US" dirty="0"/>
+          </a:p>
+        </p:txBody>
+      </p:sp>
+    </p:spTree>
+    <p:extLst>
+      <p:ext uri="{BB962C8B-B14F-4D97-AF65-F5344CB8AC3E}">
+        <p14:creationId xmlns:p14="http://schemas.microsoft.com/office/powerpoint/2010/main" val="2485974139"/>
+      </p:ext>
+    </p:extLst>
+  </p:cSld>
+  <p:clrMapOvr>
+    <a:masterClrMapping/>
+  </p:clrMapOvr>
+</p:sld>
+</file>
+
+<file path=ppt/slides/slide18.xml><?xml version="1.0" encoding="utf-8"?>
+<p:sld xmlns:a="http://schemas.openxmlformats.org/drawingml/2006/main" xmlns:r="http://schemas.openxmlformats.org/officeDocument/2006/relationships" xmlns:p="http://schemas.openxmlformats.org/presentationml/2006/main">
+  <p:cSld>
+    <p:spTree>
+      <p:nvGrpSpPr>
+        <p:cNvPr id="1" name=""/>
+        <p:cNvGrpSpPr/>
+        <p:nvPr/>
+      </p:nvGrpSpPr>
+      <p:grpSpPr>
+        <a:xfrm>
+          <a:off x="0" y="0"/>
+          <a:ext cx="0" cy="0"/>
+          <a:chOff x="0" y="0"/>
+          <a:chExt cx="0" cy="0"/>
+        </a:xfrm>
+      </p:grpSpPr>
+      <p:sp>
+        <p:nvSpPr>
+          <p:cNvPr id="2" name="Title 1">
+            <a:extLst>
+              <a:ext uri="{FF2B5EF4-FFF2-40B4-BE49-F238E27FC236}">
+                <a16:creationId xmlns:a16="http://schemas.microsoft.com/office/drawing/2014/main" id="{441CB63B-6618-8BB9-C53D-B5BE35DA6562}"/>
+              </a:ext>
+            </a:extLst>
+          </p:cNvPr>
+          <p:cNvSpPr>
+            <a:spLocks noGrp="1"/>
+          </p:cNvSpPr>
+          <p:nvPr>
+            <p:ph type="title"/>
+          </p:nvPr>
+        </p:nvSpPr>
+        <p:spPr/>
+        <p:txBody>
+          <a:bodyPr/>
+          <a:lstStyle/>
+          <a:p>
+            <a:r>
+              <a:rPr lang="en-US" dirty="0"/>
+              <a:t>Moderated Mediation</a:t>
+            </a:r>
+          </a:p>
+        </p:txBody>
+      </p:sp>
+      <p:pic>
+        <p:nvPicPr>
+          <p:cNvPr id="5" name="Content Placeholder 4" descr="A diagram of a diagram&#10;&#10;AI-generated content may be incorrect.">
+            <a:extLst>
+              <a:ext uri="{FF2B5EF4-FFF2-40B4-BE49-F238E27FC236}">
+                <a16:creationId xmlns:a16="http://schemas.microsoft.com/office/drawing/2014/main" id="{3E8CC082-3C3F-FBAB-AD54-1891D3D90AC7}"/>
+              </a:ext>
+            </a:extLst>
+          </p:cNvPr>
+          <p:cNvPicPr>
+            <a:picLocks noGrp="1" noChangeAspect="1"/>
+          </p:cNvPicPr>
+          <p:nvPr>
+            <p:ph idx="1"/>
+          </p:nvPr>
+        </p:nvPicPr>
+        <p:blipFill>
+          <a:blip r:embed="rId2"/>
+          <a:stretch>
+            <a:fillRect/>
+          </a:stretch>
+        </p:blipFill>
+        <p:spPr>
+          <a:xfrm>
+            <a:off x="2968489" y="1690688"/>
+            <a:ext cx="5221355" cy="4565860"/>
+          </a:xfrm>
+        </p:spPr>
+      </p:pic>
+    </p:spTree>
+    <p:extLst>
+      <p:ext uri="{BB962C8B-B14F-4D97-AF65-F5344CB8AC3E}">
+        <p14:creationId xmlns:p14="http://schemas.microsoft.com/office/powerpoint/2010/main" val="3842693847"/>
       </p:ext>
     </p:extLst>
   </p:cSld>
